--- a/cs701/slides/week-11.pptx
+++ b/cs701/slides/week-11.pptx
@@ -3376,7 +3376,7 @@
                   <a:srgbClr val="01AEFD"/>
                 </a:solidFill>
               </a:rPr>
-              <a:t>Type this into ReviewCheck.java   -   line 1</a:t>
+              <a:t>Make a new file, ReviewCheck.java, and type this in   -   line 1</a:t>
             </a:r>
           </a:p>
         </p:txBody>
@@ -3457,7 +3457,7 @@
                   <a:srgbClr val="DCECEF"/>
                 </a:solidFill>
               </a:rPr>
-              <a:t>Opens the class. Its name must be the file's name without .java - ReviewCheck lives in ReviewCheck.java - and every other line goes inside its braces.</a:t>
+              <a:t>Opens the class: ReviewCheck, the file's name without .java.</a:t>
             </a:r>
           </a:p>
         </p:txBody>
